--- a/public/templates/presentation-template.pptx
+++ b/public/templates/presentation-template.pptx
@@ -2928,6 +2928,20 @@
 <file path=ppt/slides/slide1.xml><?xml version="1.0" encoding="utf-8"?>
 <p:sld xmlns:a="http://schemas.openxmlformats.org/drawingml/2006/main" xmlns:r="http://schemas.openxmlformats.org/officeDocument/2006/relationships" xmlns:p="http://schemas.openxmlformats.org/presentationml/2006/main">
   <p:cSld name="Slide 1">
+    <p:bg>
+      <p:bgPr>
+        <a:blipFill dpi="0" rotWithShape="1">
+          <a:blip r:embed="rId1">
+            <a:lum/>
+          </a:blip>
+          <a:srcRect/>
+          <a:stretch>
+            <a:fillRect/>
+          </a:stretch>
+        </a:blipFill>
+        <a:effectLst/>
+      </p:bgPr>
+    </p:bg>
     <p:spTree>
       <p:nvGrpSpPr>
         <p:cNvPr id="1" name=""/>
@@ -2951,7 +2965,7 @@
           <p:nvPr/>
         </p:nvPicPr>
         <p:blipFill>
-          <a:blip r:embed="rId1"/>
+          <a:blip r:embed="rId2"/>
           <a:stretch>
             <a:fillRect/>
           </a:stretch>
@@ -3188,6 +3202,20 @@
 <file path=ppt/slides/slide10.xml><?xml version="1.0" encoding="utf-8"?>
 <p:sld xmlns:a="http://schemas.openxmlformats.org/drawingml/2006/main" xmlns:r="http://schemas.openxmlformats.org/officeDocument/2006/relationships" xmlns:p="http://schemas.openxmlformats.org/presentationml/2006/main">
   <p:cSld name="Slide 10">
+    <p:bg>
+      <p:bgPr>
+        <a:blipFill dpi="0" rotWithShape="1">
+          <a:blip r:embed="rId1">
+            <a:lum/>
+          </a:blip>
+          <a:srcRect/>
+          <a:stretch>
+            <a:fillRect/>
+          </a:stretch>
+        </a:blipFill>
+        <a:effectLst/>
+      </p:bgPr>
+    </p:bg>
     <p:spTree>
       <p:nvGrpSpPr>
         <p:cNvPr id="1" name=""/>
@@ -4099,6 +4127,20 @@
 <file path=ppt/slides/slide11.xml><?xml version="1.0" encoding="utf-8"?>
 <p:sld xmlns:a="http://schemas.openxmlformats.org/drawingml/2006/main" xmlns:r="http://schemas.openxmlformats.org/officeDocument/2006/relationships" xmlns:p="http://schemas.openxmlformats.org/presentationml/2006/main">
   <p:cSld name="Slide 11">
+    <p:bg>
+      <p:bgPr>
+        <a:blipFill dpi="0" rotWithShape="1">
+          <a:blip r:embed="rId1">
+            <a:lum/>
+          </a:blip>
+          <a:srcRect/>
+          <a:stretch>
+            <a:fillRect/>
+          </a:stretch>
+        </a:blipFill>
+        <a:effectLst/>
+      </p:bgPr>
+    </p:bg>
     <p:spTree>
       <p:nvGrpSpPr>
         <p:cNvPr id="1" name=""/>
@@ -5098,6 +5140,20 @@
 <file path=ppt/slides/slide12.xml><?xml version="1.0" encoding="utf-8"?>
 <p:sld xmlns:a="http://schemas.openxmlformats.org/drawingml/2006/main" xmlns:r="http://schemas.openxmlformats.org/officeDocument/2006/relationships" xmlns:p="http://schemas.openxmlformats.org/presentationml/2006/main">
   <p:cSld name="Slide 12">
+    <p:bg>
+      <p:bgPr>
+        <a:blipFill dpi="0" rotWithShape="1">
+          <a:blip r:embed="rId1">
+            <a:lum/>
+          </a:blip>
+          <a:srcRect/>
+          <a:stretch>
+            <a:fillRect/>
+          </a:stretch>
+        </a:blipFill>
+        <a:effectLst/>
+      </p:bgPr>
+    </p:bg>
     <p:spTree>
       <p:nvGrpSpPr>
         <p:cNvPr id="1" name=""/>
@@ -5240,6 +5296,20 @@
 <file path=ppt/slides/slide13.xml><?xml version="1.0" encoding="utf-8"?>
 <p:sld xmlns:a="http://schemas.openxmlformats.org/drawingml/2006/main" xmlns:r="http://schemas.openxmlformats.org/officeDocument/2006/relationships" xmlns:p="http://schemas.openxmlformats.org/presentationml/2006/main">
   <p:cSld name="Slide 13">
+    <p:bg>
+      <p:bgPr>
+        <a:blipFill dpi="0" rotWithShape="1">
+          <a:blip r:embed="rId1">
+            <a:lum/>
+          </a:blip>
+          <a:srcRect/>
+          <a:stretch>
+            <a:fillRect/>
+          </a:stretch>
+        </a:blipFill>
+        <a:effectLst/>
+      </p:bgPr>
+    </p:bg>
     <p:spTree>
       <p:nvGrpSpPr>
         <p:cNvPr id="1" name=""/>
@@ -5427,7 +5497,7 @@
           <p:nvPr/>
         </p:nvPicPr>
         <p:blipFill>
-          <a:blip r:embed="rId1"/>
+          <a:blip r:embed="rId2"/>
           <a:stretch>
             <a:fillRect/>
           </a:stretch>
@@ -5588,7 +5658,7 @@
           <p:nvPr/>
         </p:nvPicPr>
         <p:blipFill>
-          <a:blip r:embed="rId2"/>
+          <a:blip r:embed="rId3"/>
           <a:stretch>
             <a:fillRect/>
           </a:stretch>
@@ -5749,7 +5819,7 @@
           <p:nvPr/>
         </p:nvPicPr>
         <p:blipFill>
-          <a:blip r:embed="rId3"/>
+          <a:blip r:embed="rId4"/>
           <a:stretch>
             <a:fillRect/>
           </a:stretch>
@@ -5910,7 +5980,7 @@
           <p:nvPr/>
         </p:nvPicPr>
         <p:blipFill>
-          <a:blip r:embed="rId4"/>
+          <a:blip r:embed="rId5"/>
           <a:stretch>
             <a:fillRect/>
           </a:stretch>
@@ -6062,6 +6132,20 @@
 <file path=ppt/slides/slide14.xml><?xml version="1.0" encoding="utf-8"?>
 <p:sld xmlns:a="http://schemas.openxmlformats.org/drawingml/2006/main" xmlns:r="http://schemas.openxmlformats.org/officeDocument/2006/relationships" xmlns:p="http://schemas.openxmlformats.org/presentationml/2006/main">
   <p:cSld name="Slide 14">
+    <p:bg>
+      <p:bgPr>
+        <a:blipFill dpi="0" rotWithShape="1">
+          <a:blip r:embed="rId1">
+            <a:lum/>
+          </a:blip>
+          <a:srcRect/>
+          <a:stretch>
+            <a:fillRect/>
+          </a:stretch>
+        </a:blipFill>
+        <a:effectLst/>
+      </p:bgPr>
+    </p:bg>
     <p:spTree>
       <p:nvGrpSpPr>
         <p:cNvPr id="1" name=""/>
@@ -6085,7 +6169,7 @@
           <p:nvPr/>
         </p:nvPicPr>
         <p:blipFill>
-          <a:blip r:embed="rId1"/>
+          <a:blip r:embed="rId2"/>
           <a:stretch>
             <a:fillRect/>
           </a:stretch>
@@ -6267,6 +6351,20 @@
 <file path=ppt/slides/slide2.xml><?xml version="1.0" encoding="utf-8"?>
 <p:sld xmlns:a="http://schemas.openxmlformats.org/drawingml/2006/main" xmlns:r="http://schemas.openxmlformats.org/officeDocument/2006/relationships" xmlns:p="http://schemas.openxmlformats.org/presentationml/2006/main">
   <p:cSld name="Slide 2">
+    <p:bg>
+      <p:bgPr>
+        <a:blipFill dpi="0" rotWithShape="1">
+          <a:blip r:embed="rId1">
+            <a:lum/>
+          </a:blip>
+          <a:srcRect/>
+          <a:stretch>
+            <a:fillRect/>
+          </a:stretch>
+        </a:blipFill>
+        <a:effectLst/>
+      </p:bgPr>
+    </p:bg>
     <p:spTree>
       <p:nvGrpSpPr>
         <p:cNvPr id="1" name=""/>
@@ -7090,7 +7188,7 @@
           <p:nvPr/>
         </p:nvPicPr>
         <p:blipFill>
-          <a:blip r:embed="rId1"/>
+          <a:blip r:embed="rId2"/>
           <a:stretch>
             <a:fillRect/>
           </a:stretch>
@@ -7164,6 +7262,20 @@
 <file path=ppt/slides/slide3.xml><?xml version="1.0" encoding="utf-8"?>
 <p:sld xmlns:a="http://schemas.openxmlformats.org/drawingml/2006/main" xmlns:r="http://schemas.openxmlformats.org/officeDocument/2006/relationships" xmlns:p="http://schemas.openxmlformats.org/presentationml/2006/main">
   <p:cSld name="Slide 3">
+    <p:bg>
+      <p:bgPr>
+        <a:blipFill dpi="0" rotWithShape="1">
+          <a:blip r:embed="rId1">
+            <a:lum/>
+          </a:blip>
+          <a:srcRect/>
+          <a:stretch>
+            <a:fillRect/>
+          </a:stretch>
+        </a:blipFill>
+        <a:effectLst/>
+      </p:bgPr>
+    </p:bg>
     <p:spTree>
       <p:nvGrpSpPr>
         <p:cNvPr id="1" name=""/>
@@ -7345,6 +7457,20 @@
 <file path=ppt/slides/slide4.xml><?xml version="1.0" encoding="utf-8"?>
 <p:sld xmlns:a="http://schemas.openxmlformats.org/drawingml/2006/main" xmlns:r="http://schemas.openxmlformats.org/officeDocument/2006/relationships" xmlns:p="http://schemas.openxmlformats.org/presentationml/2006/main">
   <p:cSld name="Slide 4">
+    <p:bg>
+      <p:bgPr>
+        <a:blipFill dpi="0" rotWithShape="1">
+          <a:blip r:embed="rId1">
+            <a:lum/>
+          </a:blip>
+          <a:srcRect/>
+          <a:stretch>
+            <a:fillRect/>
+          </a:stretch>
+        </a:blipFill>
+        <a:effectLst/>
+      </p:bgPr>
+    </p:bg>
     <p:spTree>
       <p:nvGrpSpPr>
         <p:cNvPr id="1" name=""/>
@@ -7638,7 +7764,7 @@
           <p:nvPr/>
         </p:nvPicPr>
         <p:blipFill>
-          <a:blip r:embed="rId1"/>
+          <a:blip r:embed="rId2"/>
           <a:stretch>
             <a:fillRect/>
           </a:stretch>
@@ -7790,6 +7916,20 @@
 <file path=ppt/slides/slide5.xml><?xml version="1.0" encoding="utf-8"?>
 <p:sld xmlns:a="http://schemas.openxmlformats.org/drawingml/2006/main" xmlns:r="http://schemas.openxmlformats.org/officeDocument/2006/relationships" xmlns:p="http://schemas.openxmlformats.org/presentationml/2006/main">
   <p:cSld name="Slide 5">
+    <p:bg>
+      <p:bgPr>
+        <a:blipFill dpi="0" rotWithShape="1">
+          <a:blip r:embed="rId1">
+            <a:lum/>
+          </a:blip>
+          <a:srcRect/>
+          <a:stretch>
+            <a:fillRect/>
+          </a:stretch>
+        </a:blipFill>
+        <a:effectLst/>
+      </p:bgPr>
+    </p:bg>
     <p:spTree>
       <p:nvGrpSpPr>
         <p:cNvPr id="1" name=""/>
@@ -8284,6 +8424,20 @@
 <file path=ppt/slides/slide6.xml><?xml version="1.0" encoding="utf-8"?>
 <p:sld xmlns:a="http://schemas.openxmlformats.org/drawingml/2006/main" xmlns:r="http://schemas.openxmlformats.org/officeDocument/2006/relationships" xmlns:p="http://schemas.openxmlformats.org/presentationml/2006/main">
   <p:cSld name="Slide 6">
+    <p:bg>
+      <p:bgPr>
+        <a:blipFill dpi="0" rotWithShape="1">
+          <a:blip r:embed="rId1">
+            <a:lum/>
+          </a:blip>
+          <a:srcRect/>
+          <a:stretch>
+            <a:fillRect/>
+          </a:stretch>
+        </a:blipFill>
+        <a:effectLst/>
+      </p:bgPr>
+    </p:bg>
     <p:spTree>
       <p:nvGrpSpPr>
         <p:cNvPr id="1" name=""/>
@@ -8439,7 +8593,7 @@
           <p:nvPr/>
         </p:nvPicPr>
         <p:blipFill>
-          <a:blip r:embed="rId1"/>
+          <a:blip r:embed="rId2"/>
           <a:stretch>
             <a:fillRect/>
           </a:stretch>
@@ -8633,6 +8787,20 @@
 <file path=ppt/slides/slide7.xml><?xml version="1.0" encoding="utf-8"?>
 <p:sld xmlns:a="http://schemas.openxmlformats.org/drawingml/2006/main" xmlns:r="http://schemas.openxmlformats.org/officeDocument/2006/relationships" xmlns:p="http://schemas.openxmlformats.org/presentationml/2006/main">
   <p:cSld name="Slide 7">
+    <p:bg>
+      <p:bgPr>
+        <a:blipFill dpi="0" rotWithShape="1">
+          <a:blip r:embed="rId1">
+            <a:lum/>
+          </a:blip>
+          <a:srcRect/>
+          <a:stretch>
+            <a:fillRect/>
+          </a:stretch>
+        </a:blipFill>
+        <a:effectLst/>
+      </p:bgPr>
+    </p:bg>
     <p:spTree>
       <p:nvGrpSpPr>
         <p:cNvPr id="1" name=""/>
@@ -8820,7 +8988,7 @@
           <p:nvPr/>
         </p:nvPicPr>
         <p:blipFill>
-          <a:blip r:embed="rId1"/>
+          <a:blip r:embed="rId2"/>
           <a:stretch>
             <a:fillRect/>
           </a:stretch>
@@ -8981,7 +9149,7 @@
           <p:nvPr/>
         </p:nvPicPr>
         <p:blipFill>
-          <a:blip r:embed="rId2"/>
+          <a:blip r:embed="rId3"/>
           <a:stretch>
             <a:fillRect/>
           </a:stretch>
@@ -9142,7 +9310,7 @@
           <p:nvPr/>
         </p:nvPicPr>
         <p:blipFill>
-          <a:blip r:embed="rId3"/>
+          <a:blip r:embed="rId4"/>
           <a:stretch>
             <a:fillRect/>
           </a:stretch>
@@ -9303,7 +9471,7 @@
           <p:nvPr/>
         </p:nvPicPr>
         <p:blipFill>
-          <a:blip r:embed="rId4"/>
+          <a:blip r:embed="rId5"/>
           <a:stretch>
             <a:fillRect/>
           </a:stretch>
@@ -9455,6 +9623,20 @@
 <file path=ppt/slides/slide8.xml><?xml version="1.0" encoding="utf-8"?>
 <p:sld xmlns:a="http://schemas.openxmlformats.org/drawingml/2006/main" xmlns:r="http://schemas.openxmlformats.org/officeDocument/2006/relationships" xmlns:p="http://schemas.openxmlformats.org/presentationml/2006/main">
   <p:cSld name="Slide 8">
+    <p:bg>
+      <p:bgPr>
+        <a:blipFill dpi="0" rotWithShape="1">
+          <a:blip r:embed="rId1">
+            <a:lum/>
+          </a:blip>
+          <a:srcRect/>
+          <a:stretch>
+            <a:fillRect/>
+          </a:stretch>
+        </a:blipFill>
+        <a:effectLst/>
+      </p:bgPr>
+    </p:bg>
     <p:spTree>
       <p:nvGrpSpPr>
         <p:cNvPr id="1" name=""/>
@@ -9586,7 +9768,7 @@
         </p:xfrm>
         <a:graphic xmlns:a="http://schemas.openxmlformats.org/drawingml/2006/main">
           <a:graphicData uri="http://schemas.openxmlformats.org/drawingml/2006/chart">
-            <c:chart xmlns:c="http://schemas.openxmlformats.org/drawingml/2006/chart" r:id="rId1"/>
+            <c:chart xmlns:c="http://schemas.openxmlformats.org/drawingml/2006/chart" r:id="rId2"/>
           </a:graphicData>
         </a:graphic>
       </p:graphicFrame>
@@ -9761,6 +9943,20 @@
 <file path=ppt/slides/slide9.xml><?xml version="1.0" encoding="utf-8"?>
 <p:sld xmlns:a="http://schemas.openxmlformats.org/drawingml/2006/main" xmlns:r="http://schemas.openxmlformats.org/officeDocument/2006/relationships" xmlns:p="http://schemas.openxmlformats.org/presentationml/2006/main">
   <p:cSld name="Slide 9">
+    <p:bg>
+      <p:bgPr>
+        <a:blipFill dpi="0" rotWithShape="1">
+          <a:blip r:embed="rId1">
+            <a:lum/>
+          </a:blip>
+          <a:srcRect/>
+          <a:stretch>
+            <a:fillRect/>
+          </a:stretch>
+        </a:blipFill>
+        <a:effectLst/>
+      </p:bgPr>
+    </p:bg>
     <p:spTree>
       <p:nvGrpSpPr>
         <p:cNvPr id="1" name=""/>
